--- a/entregables/presentacion_fase5.pptx
+++ b/entregables/presentacion_fase5.pptx
@@ -1130,7 +1130,7 @@
           <a:p>
             <a:r>
               <a:rPr lang="en-US" dirty="0"/>
-              <a:t>Three-part filter: the practical question is which price band suits each genre; the data shows Q1 is systematically lowest; the chart confirms it visually, bar by bar.</a:t>
+              <a:t>Three-part filter: the practical question is which price band suits each genre; the data shows Q1 never wins and is almost always lowest; the chart shows the gap genre by genre.</a:t>
             </a:r>
             <a:endParaRPr lang="en-US" dirty="0"/>
           </a:p>
@@ -1394,7 +1394,7 @@
           <a:p>
             <a:r>
               <a:rPr lang="en-US" dirty="0"/>
-              <a:t>This is the key check against the most obvious alternative interpretation: that cheap games have simply been on the market longer and accumulated more negative reviews because of that.</a:t>
+              <a:t>This is the key check against the most obvious alternative interpretation: that cheap games are simply older. It turned out partly right, which narrows the finding for recent games and strengthens the recommendation.</a:t>
             </a:r>
             <a:endParaRPr lang="en-US" dirty="0"/>
           </a:p>
@@ -4295,7 +4295,7 @@
                 <a:ea typeface="Cambria" pitchFamily="34" charset="-122"/>
                 <a:cs typeface="Cambria" pitchFamily="34" charset="-120"/>
               </a:rPr>
-              <a:t>The cheapest band has the worst reception, across all 10 genres without exception</a:t>
+              <a:t>The cheapest band is never the best-received, in any of the 10 genres</a:t>
             </a:r>
             <a:endParaRPr lang="en-US" sz="2200" dirty="0"/>
           </a:p>
@@ -4376,7 +4376,7 @@
                   <a:srgbClr val="1A1A2E"/>
                 </a:solidFill>
               </a:rPr>
-              <a:t>In each of the 10 real game genres, the cheapest price band (≤$3.25 adjusted) gets the lowest median % of positive reviews. The improvement moving to the best band ranges from +2.5 to +5.0 percentage points.</a:t>
+              <a:t>In none of the 10 real game genres is the cheapest price band (≤$3.25 adjusted) the best-received, and in 9 it gets the lowest median % of positive reviews; the exception is Massively Multiplayer. The improvement moving to the best band ranges from +2.5 to +5.0 percentage points.</a:t>
             </a:r>
             <a:endParaRPr lang="en-US" sz="1250" dirty="0"/>
           </a:p>
@@ -4606,7 +4606,7 @@
                   <a:srgbClr val="1A1A2E"/>
                 </a:solidFill>
               </a:rPr>
-              <a:t>The heatmap shows the reception peak is at Q3 ($6.46-$12.36) or Q4, depending on genre — never Q1 or Q2. There is no simple linear "more expensive is always better" relationship.</a:t>
+              <a:t>The heatmap shows the reception peak is at Q3 ($6.46-$12.36) or Q4, depending on genre (Q2 only in Massively Multiplayer) — never Q1. There is no simple linear "more expensive is always better" relationship.</a:t>
             </a:r>
             <a:endParaRPr lang="en-US" sz="1250" dirty="0"/>
           </a:p>
@@ -4985,7 +4985,7 @@
                 <a:ea typeface="Cambria" pitchFamily="34" charset="-122"/>
                 <a:cs typeface="Cambria" pitchFamily="34" charset="-120"/>
               </a:rPr>
-              <a:t>The pattern is not an artefact of the game's age</a:t>
+              <a:t>Age explains part of it: among recent games, the pattern holds in three genres</a:t>
             </a:r>
             <a:endParaRPr lang="en-US" sz="2200" dirty="0"/>
           </a:p>
@@ -5066,7 +5066,7 @@
                   <a:srgbClr val="1A1A2E"/>
                 </a:solidFill>
               </a:rPr>
-              <a:t>We split recent games from older ones: across the four reference genres, Q1 remains the weakest band in both groups. The correlation between age and % positive reviews is just -0.087.</a:t>
+              <a:t>We split games at the median age (6 years). Among older games, Q1 comes last in all 9 genres with enough data. Among recent ones, only in Adventure, Indie and Casual — the same three we recommend.</a:t>
             </a:r>
             <a:endParaRPr lang="en-US" sz="1250" dirty="0"/>
           </a:p>
